--- a/docs/presentation/LabLedger_Capstone_Presentation.pptx
+++ b/docs/presentation/LabLedger_Capstone_Presentation.pptx
@@ -523,12 +523,12 @@
           </a:p>
           <a:p>
             <a:r>
-              <a:t>State the scope accurately: the application, CI and local Kubernetes have run; real AWS apply and teardown remain pending approval.</a:t>
-            </a:r>
-          </a:p>
-          <a:p>
-            <a:r>
-              <a:t>The slides support a live presentation. The separate short video records only the actual local Terminal evidence, not a complete browser walkthrough.</a:t>
+              <a:t>The application, CI, local Kubernetes and temporary personal AWS EKS ran successfully. Actual cleanup was verified separately before this final deck was built.</a:t>
+            </a:r>
+          </a:p>
+          <a:p>
+            <a:r>
+              <a:t>The title image remains the original local UI capture, not an AWS browser image. New Terminal/API evidence documents the cloud run; private browser captures are not embedded while publication approval is pending.</a:t>
             </a:r>
           </a:p>
         </p:txBody>
@@ -598,22 +598,22 @@
           <a:lstStyle/>
           <a:p>
             <a:r>
-              <a:t>This is the genuine unfiltered School-profile browser screenshot after the documented local-only configuration repair:14 applicable targets UP across13 pools.</a:t>
-            </a:r>
-          </a:p>
-          <a:p>
-            <a:r>
-              <a:t>The original three optional loopback-only control-plane endpoint failures are still retained. Their endpoints did not become reachable; the local override excludes those inapplicable component scrapes.</a:t>
-            </a:r>
-          </a:p>
-          <a:p>
-            <a:r>
-              <a:t>Both API replicas remain scraped. Grafana authenticated API previously returned the six-panel dashboard with positive actual traffic samples, but no populated browser screenshot is claimed.</a:t>
-            </a:r>
-          </a:p>
-          <a:p>
-            <a:r>
-              <a:t>Open the real Grafana UI using legitimate private login in the School profile. Never show a login page or dashboard JSON as evidence of a populated panel.</a:t>
+              <a:t>This is a genuine native Terminal display of explicitly saved cloud checks, not a browser dashboard. Prometheus returned 16/16 UP before scaling; HPA temporarily increased the API target count.</a:t>
+            </a:r>
+          </a:p>
+          <a:p>
+            <a:r>
+              <a:t>Grafana's authenticated API returned the actual six-panel dashboard, six traffic series and positive samples. Credentials remained in RAM. A populated browser panel is still a separate capture requirement.</a:t>
+            </a:r>
+          </a:p>
+          <a:p>
+            <a:r>
+              <a:t>The initial local loopback-only control-plane failures and local repair remain historical evidence. EKS uses its separately documented managed-control-plane scrape profile.</a:t>
+            </a:r>
+          </a:p>
+          <a:p>
+            <a:r>
+              <a:t>Private Console/app/Prometheus browser images were captured separately and remain unpublished pending their specific publication approval. No browser pixels are embedded here.</a:t>
             </a:r>
           </a:p>
         </p:txBody>
@@ -683,22 +683,22 @@
           <a:lstStyle/>
           <a:p>
             <a:r>
-              <a:t>The actual read-only personal-account plan proposes62 creates, zero changes and zero deletes. Nine mock tests and provider validation passed, but these are not proof of a running EKS cluster.</a:t>
-            </a:r>
-          </a:p>
-          <a:p>
-            <a:r>
-              <a:t>The proposed isolated Mumbai environment contains a VPC, two public/two private subnets, one NAT, one EKS cluster/worker and a Terraform-owned HTTP NLB.</a:t>
-            </a:r>
-          </a:p>
-          <a:p>
-            <a:r>
-              <a:t>Official API prices support a two-hour bounded illustrative estimate of2.432349USD before tax; the approved conditional ceiling is10USD/max2h. This is not a hard automated billing cap.</a:t>
-            </a:r>
-          </a:p>
-          <a:p>
-            <a:r>
-              <a:t>Exact IAM/temporary admin/controller RBAC/public-network and package-visibility decisions remain pending. No access grant, AWS resource, cost, Console screenshot or destroy success is claimed.</a:t>
+              <a:t>The actual frozen personal-account plan created 62 resources, zero changes/deletions. Mumbai EKS 1.34 and its managed t3.large group became ACTIVE. The VPC had two public/two private subnets, NAT and a Terraform-owned HTTP NLB.</a:t>
+            </a:r>
+          </a:p>
+          <a:p>
+            <a:r>
+              <a:t>The screenshot is an original native Terminal capture displaying actual completed destroy output and explicitly recorded post-deletion API checks. The separate apply capture preserves the actual 62-create output and ACTIVE EKS/node-group responses. Separate Console captures remain private until publication approval.</a:t>
+            </a:r>
+          </a:p>
+          <a:p>
+            <a:r>
+              <a:t>After actual runtime evidence, the disposable PostgreSQL PVC/EBS was removed while CSI/node permissions remained available. A separately reviewed 62-delete Terraform plan removed the new infrastructure; post-cleanup API/state checks are linked in the evidence gallery.</a:t>
+            </a:r>
+          </a:p>
+          <a:p>
+            <a:r>
+              <a:t>The final build requires a successful actual cleanup-verification file. The approved ceiling was US$10 / maximum two hours. The US$2.43 before-tax scenario is a planning estimate, not a measured final bill or automated billing cap.</a:t>
             </a:r>
           </a:p>
         </p:txBody>
@@ -778,12 +778,12 @@
           </a:p>
           <a:p>
             <a:r>
-              <a:t>Finish any actual AWS work only after the pending access/visibility decisions and legitimate Console authentication. Capture and clean up real resources before claiming the cloud module.</a:t>
-            </a:r>
-          </a:p>
-          <a:p>
-            <a:r>
-              <a:t>The school form is filled for Jaivardhan D Rao, Group A, roll 10117 and the official SST email. The user reviews and submits manually. No submission or receipt is claimed.</a:t>
+              <a:t>Actual cloud deployment, delivery update, metrics, troubleshooting and project-only cleanup are complete. The temporary AWS endpoint is retired; local demonstration instructions remain reproducible.</a:t>
+            </a:r>
+          </a:p>
+          <a:p>
+            <a:r>
+              <a:t>The student reported manually submitting the form. No automated submission, instructor acceptance or submission receipt is claimed, and no further form actions are performed.</a:t>
             </a:r>
           </a:p>
         </p:txBody>
@@ -953,7 +953,7 @@
           </a:p>
           <a:p>
             <a:r>
-              <a:t>Kubernetes API and monitoring UIs are not public in this local demonstration. A real cloud public endpoint has not been created.</a:t>
+              <a:t>The temporary cloud path was public HTTP NLB to NodePort30080, NGINX Ingress, ClusterIP Services and PostgreSQL. Monitoring remained loopback-only. The endpoint was retired after evidence capture.</a:t>
             </a:r>
           </a:p>
         </p:txBody>
@@ -1108,7 +1108,7 @@
           <a:lstStyle/>
           <a:p>
             <a:r>
-              <a:t>This is a fresh actual native Terminal capture. The Compose service is named database, while the Kubernetes StatefulSet is named labledger-postgres.</a:t>
+              <a:t>This is an original actual local Terminal capture. The Compose service is named database, while the Kubernetes StatefulSet is named labledger-postgres. The later cloud database/table and container UID results are separate.</a:t>
             </a:r>
           </a:p>
           <a:p>
@@ -1193,22 +1193,22 @@
           <a:lstStyle/>
           <a:p>
             <a:r>
-              <a:t>Show the meaningful history and actual completed main-push run38915964006, all seven jobs green for source5cb1c80.</a:t>
-            </a:r>
-          </a:p>
-          <a:p>
-            <a:r>
-              <a:t>The earlier visible footer change went through runs38909132624 and38909739859. Helm4 rejected the first promotion preflight flag, so no deployment was claimed for that failure.</a:t>
-            </a:r>
-          </a:p>
-          <a:p>
-            <a:r>
-              <a:t>The repaired c2f4acf revision then passed CI and completed exact-Git-archive promotion: two Ready API and UI replicas, new footer served, old footer absent.</a:t>
-            </a:r>
-          </a:p>
-          <a:p>
-            <a:r>
-              <a:t>The current source-only cloud-preparation commit5cb1c80 is green but is not claimed deployed locally. Full SHAs identify images; the workflow does not deploy automatically to AWS.</a:t>
+              <a:t>Show actual completed run 38934060961, seven successful jobs for 06909ce. It tested the controller fix and published both multiarch SHA image tags.</a:t>
+            </a:r>
+          </a:p>
+          <a:p>
+            <a:r>
+              <a:t>Anonymous exact-tag manifest fetches succeeded. A deliberate personal-account Helm promotion then rolled the cloud application to exactly06909ce, release2, with Ready UI/API Pods.</a:t>
+            </a:r>
+          </a:p>
+          <a:p>
+            <a:r>
+              <a:t>The screenshot combines explicitly completed CI/promotion records with actual current Deployment image queries. A later documentation-only commit is not a newly tested image.</a:t>
+            </a:r>
+          </a:p>
+          <a:p>
+            <a:r>
+              <a:t>The earlier visible footer change and c2f4acf local rollout remain independently documented. CI publishes images; AWS promotion is an explicit guarded step, not automatic cloud access.</a:t>
             </a:r>
           </a:p>
         </p:txBody>
@@ -1288,7 +1288,7 @@
           </a:p>
           <a:p>
             <a:r>
-              <a:t>Trivy uses HIGH,CRITICAL with ignore-unfixed=false and exit-code1; no broad ignore gate was added. All four actual downloaded current CI reports have zero HIGH/CRITICAL findings.</a:t>
+              <a:t>Trivy uses HIGH,CRITICAL with ignore-unfixed=false and exit-code1; no broad ignore gate was added. Earlier downloaded reports have zero HIGH/CRITICAL findings. Fresh06909ce metadata verifies all four strict scan jobs succeeded; their raw report ZIPs were not downloaded.</a:t>
             </a:r>
           </a:p>
           <a:p>
@@ -1363,12 +1363,12 @@
           <a:lstStyle/>
           <a:p>
             <a:r>
-              <a:t>Show the exact labledger-capstone context rather than relying on the current global context. The older coursework cluster is preserved.</a:t>
-            </a:r>
-          </a:p>
-          <a:p>
-            <a:r>
-              <a:t>Both UI and API Deployments have two Ready replicas. Their Services are ClusterIP. PostgreSQL is a StatefulSet with a PVC; the migration Job completed successfully.</a:t>
+              <a:t>The screenshot displays the explicitly saved actual cloud API snapshot, with its original capture time and source file. It is not represented as a fresh cluster query after teardown. The existing local coursework cluster was preserved.</a:t>
+            </a:r>
+          </a:p>
+          <a:p>
+            <a:r>
+              <a:t>Both UI and API Deployments had two Ready replicas after HPA cooldown. Their Services are ClusterIP. PostgreSQL used an encrypted 2GiB gp3 PVC; the migration Job completed successfully.</a:t>
             </a:r>
           </a:p>
           <a:p>
@@ -1378,7 +1378,7 @@
           </a:p>
           <a:p>
             <a:r>
-              <a:t>The local storage class is standard, not the prepared AWS gp3 class. These are genuine local Kubernetes results, not EKS results.</a:t>
+              <a:t>Actual public NLB routing and cloud CRUD succeeded. This is genuine cloud evidence captured before approved teardown, not a claim that the temporary endpoint remains online.</a:t>
             </a:r>
           </a:p>
         </p:txBody>
@@ -1448,17 +1448,17 @@
           <a:lstStyle/>
           <a:p>
             <a:r>
-              <a:t>Use the retained original load/drill logs; this evidence is historical and no new fault or load is injected during this presentation capture.</a:t>
-            </a:r>
-          </a:p>
-          <a:p>
-            <a:r>
-              <a:t>The actual HPA rose from 2 to 4 Ready API Pods under CPU load and later returned to 2. The persistent read load recorded 2338 requests with zero failures.</a:t>
-            </a:r>
-          </a:p>
-          <a:p>
-            <a:r>
-              <a:t>A deliberately broken Service selector produced503/no endpoints; restoring the selector restored200. One earlier drill was affected by controller reconciliation and is retained separately.</a:t>
+              <a:t>Use the actual cloud load/drill records. HPA rose from 2 to 4 Ready API Pods and returned to 2; the worker count remained one.</a:t>
+            </a:r>
+          </a:p>
+          <a:p>
+            <a:r>
+              <a:t>The 90-second burst recorded 7,431 HTTP200 and 12 failures. Failure categories were not retained, so their cause is not established. A separate lower-rate recovery check passed 40/40; this is not a claim that the burst workload was repaired.</a:t>
+            </a:r>
+          </a:p>
+          <a:p>
+            <a:r>
+              <a:t>A deliberately broken cloud Service selector produced502/no endpoints; exact restoration restored200. The initial EndpointSlice-null instrumentation error and its successful finally-restoration are retained separately.</a:t>
             </a:r>
           </a:p>
           <a:p>
@@ -4552,7 +4552,7 @@
               </a:defRPr>
             </a:pPr>
             <a:r>
-              <a:t>DEVOPS FINAL CAPSTONE · LOCAL DEMONSTRATION</a:t>
+              <a:t>DEVOPS FINAL CAPSTONE · LOCAL AND AWS EVIDENCE</a:t>
             </a:r>
           </a:p>
         </p:txBody>
@@ -4911,7 +4911,7 @@
               </a:defRPr>
             </a:pPr>
             <a:r>
-              <a:t>VERIFIED LOCALLY</a:t>
+              <a:t>VERIFIED ON EKS</a:t>
             </a:r>
           </a:p>
         </p:txBody>
@@ -4956,7 +4956,7 @@
               </a:defRPr>
             </a:pPr>
             <a:r>
-              <a:t>Cloud execution is still pending.</a:t>
+              <a:t>Temporary cloud demo cleaned up.</a:t>
             </a:r>
           </a:p>
         </p:txBody>
@@ -5228,7 +5228,7 @@
       </p:sp>
       <p:pic>
         <p:nvPicPr>
-          <p:cNvPr id="7" name="Picture 6" descr="prometheus-applicable-targets-summary-updated.jpg"/>
+          <p:cNvPr id="7" name="Picture 6" descr="cloud-verification-terminal.png"/>
           <p:cNvPicPr>
             <a:picLocks noChangeAspect="1"/>
           </p:cNvPicPr>
@@ -5242,8 +5242,8 @@
         </p:blipFill>
         <p:spPr>
           <a:xfrm>
-            <a:off x="2421287" y="1320800"/>
-            <a:ext cx="7349424" cy="4254500"/>
+            <a:off x="2733572" y="1320800"/>
+            <a:ext cx="6724854" cy="4254500"/>
           </a:xfrm>
           <a:prstGeom prst="rect">
             <a:avLst/>
@@ -5290,7 +5290,7 @@
               </a:defRPr>
             </a:pPr>
             <a:r>
-              <a:t>14 applicable targets UP; original loopback-endpoint failures and local fix retained.</a:t>
+              <a:t>Cloud: 16/16 targets UP at capture time; actual CRUD and Service recovery retained.</a:t>
             </a:r>
           </a:p>
         </p:txBody>
@@ -5441,7 +5441,7 @@
               </a:defRPr>
             </a:pPr>
             <a:r>
-              <a:t>10 · HONEST CLOUD STATUS</a:t>
+              <a:t>10 · TERRAFORM AND LIFECYCLE</a:t>
             </a:r>
           </a:p>
         </p:txBody>
@@ -5486,7 +5486,7 @@
               </a:defRPr>
             </a:pPr>
             <a:r>
-              <a:t>AWS is prepared, but has not been deployed</a:t>
+              <a:t>Real AWS deployment, then verified cleanup</a:t>
             </a:r>
           </a:p>
         </p:txBody>
@@ -5581,16 +5581,40 @@
           </a:p>
         </p:txBody>
       </p:sp>
-      <p:sp>
-        <p:nvSpPr>
-          <p:cNvPr id="7" name="TextBox 6"/>
+      <p:pic>
+        <p:nvPicPr>
+          <p:cNvPr id="7" name="Picture 6" descr="terraform-destroy-terminal.png"/>
+          <p:cNvPicPr>
+            <a:picLocks noChangeAspect="1"/>
+          </p:cNvPicPr>
+          <p:nvPr/>
+        </p:nvPicPr>
+        <p:blipFill>
+          <a:blip r:embed="rId3"/>
+          <a:stretch>
+            <a:fillRect/>
+          </a:stretch>
+        </p:blipFill>
+        <p:spPr>
+          <a:xfrm>
+            <a:off x="2733572" y="1320800"/>
+            <a:ext cx="6724854" cy="4254500"/>
+          </a:xfrm>
+          <a:prstGeom prst="rect">
+            <a:avLst/>
+          </a:prstGeom>
+        </p:spPr>
+      </p:pic>
+      <p:sp>
+        <p:nvSpPr>
+          <p:cNvPr id="8" name="TextBox 7"/>
           <p:cNvSpPr txBox="1"/>
           <p:nvPr/>
         </p:nvSpPr>
         <p:spPr>
           <a:xfrm>
-            <a:off x="812800" y="1485900"/>
-            <a:ext cx="10414000" cy="371475"/>
+            <a:off x="812800" y="5702300"/>
+            <a:ext cx="10566400" cy="276225"/>
           </a:xfrm>
           <a:prstGeom prst="rect">
             <a:avLst/>
@@ -5605,37 +5629,37 @@
           <a:p>
             <a:pPr>
               <a:lnSpc>
-                <a:spcPts val="2625"/>
-              </a:lnSpc>
-              <a:spcBef>
-                <a:spcPts val="0"/>
-              </a:spcBef>
-              <a:spcAft>
-                <a:spcPts val="0"/>
-              </a:spcAft>
-              <a:defRPr sz="2100" b="1">
-                <a:solidFill>
-                  <a:srgbClr val="17364B"/>
-                </a:solidFill>
-                <a:latin typeface="Arial"/>
-              </a:defRPr>
-            </a:pPr>
-            <a:r>
-              <a:t>Observed: a real read-only account plan</a:t>
-            </a:r>
-          </a:p>
-        </p:txBody>
-      </p:sp>
-      <p:sp>
-        <p:nvSpPr>
-          <p:cNvPr id="8" name="TextBox 7"/>
+                <a:spcPts val="1875"/>
+              </a:lnSpc>
+              <a:spcBef>
+                <a:spcPts val="0"/>
+              </a:spcBef>
+              <a:spcAft>
+                <a:spcPts val="0"/>
+              </a:spcAft>
+              <a:defRPr sz="1500" b="1">
+                <a:solidFill>
+                  <a:srgbClr val="007E80"/>
+                </a:solidFill>
+                <a:latin typeface="Arial"/>
+              </a:defRPr>
+            </a:pPr>
+            <a:r>
+              <a:t>62 created → real runtime verified → 62 destroyed; pre-existing resources preserved.</a:t>
+            </a:r>
+          </a:p>
+        </p:txBody>
+      </p:sp>
+      <p:sp>
+        <p:nvSpPr>
+          <p:cNvPr id="9" name="TextBox 8"/>
           <p:cNvSpPr txBox="1"/>
           <p:nvPr/>
         </p:nvSpPr>
         <p:spPr>
           <a:xfrm>
-            <a:off x="812800" y="1879599"/>
-            <a:ext cx="10414000" cy="307975"/>
+            <a:off x="812800" y="6057900"/>
+            <a:ext cx="10566400" cy="260350"/>
           </a:xfrm>
           <a:prstGeom prst="rect">
             <a:avLst/>
@@ -5650,15 +5674,15 @@
           <a:p>
             <a:pPr>
               <a:lnSpc>
-                <a:spcPts val="2125"/>
-              </a:lnSpc>
-              <a:spcBef>
-                <a:spcPts val="0"/>
-              </a:spcBef>
-              <a:spcAft>
-                <a:spcPts val="0"/>
-              </a:spcAft>
-              <a:defRPr sz="1700" b="0">
+                <a:spcPts val="1750"/>
+              </a:lnSpc>
+              <a:spcBef>
+                <a:spcPts val="0"/>
+              </a:spcBef>
+              <a:spcAft>
+                <a:spcPts val="0"/>
+              </a:spcAft>
+              <a:defRPr sz="1400" b="0">
                 <a:solidFill>
                   <a:srgbClr val="526C7B"/>
                 </a:solidFill>
@@ -5666,232 +5690,7 @@
               </a:defRPr>
             </a:pPr>
             <a:r>
-              <a:t>62 creates · 0 updates · 0 deletes. No apply, access grant or cloud teardown.</a:t>
-            </a:r>
-          </a:p>
-        </p:txBody>
-      </p:sp>
-      <p:sp>
-        <p:nvSpPr>
-          <p:cNvPr id="9" name="TextBox 8"/>
-          <p:cNvSpPr txBox="1"/>
-          <p:nvPr/>
-        </p:nvSpPr>
-        <p:spPr>
-          <a:xfrm>
-            <a:off x="812800" y="2378075"/>
-            <a:ext cx="10414000" cy="371475"/>
-          </a:xfrm>
-          <a:prstGeom prst="rect">
-            <a:avLst/>
-          </a:prstGeom>
-          <a:noFill/>
-        </p:spPr>
-        <p:txBody>
-          <a:bodyPr wrap="none" lIns="0" rIns="0" tIns="0" bIns="0">
-            <a:spAutoFit/>
-          </a:bodyPr>
-          <a:lstStyle/>
-          <a:p>
-            <a:pPr>
-              <a:lnSpc>
-                <a:spcPts val="2625"/>
-              </a:lnSpc>
-              <a:spcBef>
-                <a:spcPts val="0"/>
-              </a:spcBef>
-              <a:spcAft>
-                <a:spcPts val="0"/>
-              </a:spcAft>
-              <a:defRPr sz="2100" b="1">
-                <a:solidFill>
-                  <a:srgbClr val="17364B"/>
-                </a:solidFill>
-                <a:latin typeface="Arial"/>
-              </a:defRPr>
-            </a:pPr>
-            <a:r>
-              <a:t>Prepared: reproducible infrastructure and bootstrap</a:t>
-            </a:r>
-          </a:p>
-        </p:txBody>
-      </p:sp>
-      <p:sp>
-        <p:nvSpPr>
-          <p:cNvPr id="10" name="TextBox 9"/>
-          <p:cNvSpPr txBox="1"/>
-          <p:nvPr/>
-        </p:nvSpPr>
-        <p:spPr>
-          <a:xfrm>
-            <a:off x="812800" y="2771775"/>
-            <a:ext cx="10414000" cy="307975"/>
-          </a:xfrm>
-          <a:prstGeom prst="rect">
-            <a:avLst/>
-          </a:prstGeom>
-          <a:noFill/>
-        </p:spPr>
-        <p:txBody>
-          <a:bodyPr wrap="none" lIns="0" rIns="0" tIns="0" bIns="0">
-            <a:spAutoFit/>
-          </a:bodyPr>
-          <a:lstStyle/>
-          <a:p>
-            <a:pPr>
-              <a:lnSpc>
-                <a:spcPts val="2125"/>
-              </a:lnSpc>
-              <a:spcBef>
-                <a:spcPts val="0"/>
-              </a:spcBef>
-              <a:spcAft>
-                <a:spcPts val="0"/>
-              </a:spcAft>
-              <a:defRPr sz="1700" b="0">
-                <a:solidFill>
-                  <a:srgbClr val="526C7B"/>
-                </a:solidFill>
-                <a:latin typeface="Arial"/>
-              </a:defRPr>
-            </a:pPr>
-            <a:r>
-              <a:t>VPC + EKS + one worker + NLB; restricted API; Helm and monitoring; project-only cleanup.</a:t>
-            </a:r>
-          </a:p>
-        </p:txBody>
-      </p:sp>
-      <p:sp>
-        <p:nvSpPr>
-          <p:cNvPr id="11" name="TextBox 10"/>
-          <p:cNvSpPr txBox="1"/>
-          <p:nvPr/>
-        </p:nvSpPr>
-        <p:spPr>
-          <a:xfrm>
-            <a:off x="812800" y="3270250"/>
-            <a:ext cx="10414000" cy="371475"/>
-          </a:xfrm>
-          <a:prstGeom prst="rect">
-            <a:avLst/>
-          </a:prstGeom>
-          <a:noFill/>
-        </p:spPr>
-        <p:txBody>
-          <a:bodyPr wrap="none" lIns="0" rIns="0" tIns="0" bIns="0">
-            <a:spAutoFit/>
-          </a:bodyPr>
-          <a:lstStyle/>
-          <a:p>
-            <a:pPr>
-              <a:lnSpc>
-                <a:spcPts val="2625"/>
-              </a:lnSpc>
-              <a:spcBef>
-                <a:spcPts val="0"/>
-              </a:spcBef>
-              <a:spcAft>
-                <a:spcPts val="0"/>
-              </a:spcAft>
-              <a:defRPr sz="2100" b="1">
-                <a:solidFill>
-                  <a:srgbClr val="17364B"/>
-                </a:solidFill>
-                <a:latin typeface="Arial"/>
-              </a:defRPr>
-            </a:pPr>
-            <a:r>
-              <a:t>Remaining: approval and genuine cloud evidence</a:t>
-            </a:r>
-          </a:p>
-        </p:txBody>
-      </p:sp>
-      <p:sp>
-        <p:nvSpPr>
-          <p:cNvPr id="12" name="TextBox 11"/>
-          <p:cNvSpPr txBox="1"/>
-          <p:nvPr/>
-        </p:nvSpPr>
-        <p:spPr>
-          <a:xfrm>
-            <a:off x="812800" y="3663950"/>
-            <a:ext cx="10414000" cy="307975"/>
-          </a:xfrm>
-          <a:prstGeom prst="rect">
-            <a:avLst/>
-          </a:prstGeom>
-          <a:noFill/>
-        </p:spPr>
-        <p:txBody>
-          <a:bodyPr wrap="none" lIns="0" rIns="0" tIns="0" bIns="0">
-            <a:spAutoFit/>
-          </a:bodyPr>
-          <a:lstStyle/>
-          <a:p>
-            <a:pPr>
-              <a:lnSpc>
-                <a:spcPts val="2125"/>
-              </a:lnSpc>
-              <a:spcBef>
-                <a:spcPts val="0"/>
-              </a:spcBef>
-              <a:spcAft>
-                <a:spcPts val="0"/>
-              </a:spcAft>
-              <a:defRPr sz="1700" b="0">
-                <a:solidFill>
-                  <a:srgbClr val="526C7B"/>
-                </a:solidFill>
-                <a:latin typeface="Arial"/>
-              </a:defRPr>
-            </a:pPr>
-            <a:r>
-              <a:t>Exact access/visibility decisions, actual apply, Console/runtime verification and complete teardown.</a:t>
-            </a:r>
-          </a:p>
-        </p:txBody>
-      </p:sp>
-      <p:sp>
-        <p:nvSpPr>
-          <p:cNvPr id="13" name="TextBox 12"/>
-          <p:cNvSpPr txBox="1"/>
-          <p:nvPr/>
-        </p:nvSpPr>
-        <p:spPr>
-          <a:xfrm>
-            <a:off x="812800" y="5854700"/>
-            <a:ext cx="10566400" cy="292100"/>
-          </a:xfrm>
-          <a:prstGeom prst="rect">
-            <a:avLst/>
-          </a:prstGeom>
-          <a:noFill/>
-        </p:spPr>
-        <p:txBody>
-          <a:bodyPr wrap="none" lIns="0" rIns="0" tIns="0" bIns="0">
-            <a:spAutoFit/>
-          </a:bodyPr>
-          <a:lstStyle/>
-          <a:p>
-            <a:pPr>
-              <a:lnSpc>
-                <a:spcPts val="2000"/>
-              </a:lnSpc>
-              <a:spcBef>
-                <a:spcPts val="0"/>
-              </a:spcBef>
-              <a:spcAft>
-                <a:spcPts val="0"/>
-              </a:spcAft>
-              <a:defRPr sz="1600" b="1">
-                <a:solidFill>
-                  <a:srgbClr val="007E80"/>
-                </a:solidFill>
-                <a:latin typeface="Arial"/>
-              </a:defRPr>
-            </a:pPr>
-            <a:r>
-              <a:t>Pricing scenario: about US$2.43 before tax. Conditional ceiling: US$10 / maximum 2 hours.</a:t>
+              <a:t>Planning estimate about US$2.43 before tax; actual final AWS bill is not yet verified.</a:t>
             </a:r>
           </a:p>
         </p:txBody>
@@ -5997,7 +5796,7 @@
               </a:defRPr>
             </a:pPr>
             <a:r>
-              <a:t>11 · HANDOFF AND LIMITS</a:t>
+              <a:t>11 · HANDOFF</a:t>
             </a:r>
           </a:p>
         </p:txBody>
@@ -6042,7 +5841,7 @@
               </a:defRPr>
             </a:pPr>
             <a:r>
-              <a:t>Present the verified work, then review the submission</a:t>
+              <a:t>Present the verified work and its limits</a:t>
             </a:r>
           </a:p>
         </p:txBody>
@@ -6177,7 +5976,7 @@
               </a:defRPr>
             </a:pPr>
             <a:r>
-              <a:t>Ready to review</a:t>
+              <a:t>Verified and reproducible</a:t>
             </a:r>
           </a:p>
         </p:txBody>
@@ -6222,7 +6021,7 @@
               </a:defRPr>
             </a:pPr>
             <a:r>
-              <a:t>Original app, tests, containers, green CI, local Kubernetes, native evidence and these editable slides.</a:t>
+              <a:t>Original app, seven green CI jobs, exact-SHA EKS rollout, real metrics, recovery and verified cleanup.</a:t>
             </a:r>
           </a:p>
         </p:txBody>
@@ -6267,7 +6066,7 @@
               </a:defRPr>
             </a:pPr>
             <a:r>
-              <a:t>Still required for the complete presentation</a:t>
+              <a:t>Remaining evidence limits</a:t>
             </a:r>
           </a:p>
         </p:txBody>
@@ -6312,7 +6111,7 @@
               </a:defRPr>
             </a:pPr>
             <a:r>
-              <a:t>Live browser/Swagger CRUD, populated Grafana and package-page captures; genuine AWS evidence after</a:t>
+              <a:t>Private browser captures need publication approval. Populated Grafana and the full student live walkthrough</a:t>
             </a:r>
           </a:p>
           <a:p>
@@ -6334,7 +6133,7 @@
               </a:defRPr>
             </a:pPr>
             <a:r>
-              <a:t>approval.</a:t>
+              <a:t>remain separate.</a:t>
             </a:r>
           </a:p>
         </p:txBody>
@@ -6379,7 +6178,7 @@
               </a:defRPr>
             </a:pPr>
             <a:r>
-              <a:t>Final submission stays with the student</a:t>
+              <a:t>Continue in the final repository</a:t>
             </a:r>
           </a:p>
         </p:txBody>
@@ -6424,7 +6223,7 @@
               </a:defRPr>
             </a:pPr>
             <a:r>
-              <a:t>Form filled for Group A / roll 10117. Review the public repository and evidence before pressing Submit.</a:t>
+              <a:t>The student reported manual form submission. No further form action or receipt is claimed.</a:t>
             </a:r>
           </a:p>
         </p:txBody>
@@ -9195,7 +8994,7 @@
       </p:sp>
       <p:pic>
         <p:nvPicPr>
-          <p:cNvPr id="7" name="Picture 6" descr="terminal-git.png"/>
+          <p:cNvPr id="7" name="Picture 6" descr="cloud-delivery-terminal.png"/>
           <p:cNvPicPr>
             <a:picLocks noChangeAspect="1"/>
           </p:cNvPicPr>
@@ -9209,8 +9008,8 @@
         </p:blipFill>
         <p:spPr>
           <a:xfrm>
-            <a:off x="2189922" y="1346200"/>
-            <a:ext cx="7812154" cy="4445000"/>
+            <a:off x="2583016" y="1346199"/>
+            <a:ext cx="7025967" cy="4445000"/>
           </a:xfrm>
           <a:prstGeom prst="rect">
             <a:avLst/>
@@ -9257,7 +9056,7 @@
               </a:defRPr>
             </a:pPr>
             <a:r>
-              <a:t>Visible change → green CI → exact c2f4acf local rollout. Current source/CI: 5cb1c80.</a:t>
+              <a:t>Controller fix → seven green jobs → exact 06909ce EKS rollout, Helm release 2.</a:t>
             </a:r>
           </a:p>
         </p:txBody>
@@ -9883,7 +9682,7 @@
               </a:defRPr>
             </a:pPr>
             <a:r>
-              <a:t>4 clean CI reports</a:t>
+              <a:t>4 strict gates passed</a:t>
             </a:r>
           </a:p>
         </p:txBody>
@@ -9897,7 +9696,7 @@
         <p:spPr>
           <a:xfrm>
             <a:off x="6388100" y="3048000"/>
-            <a:ext cx="4635500" cy="1038225"/>
+            <a:ext cx="4635500" cy="990599"/>
           </a:xfrm>
           <a:prstGeom prst="rect">
             <a:avLst/>
@@ -9912,15 +9711,15 @@
           <a:p>
             <a:pPr>
               <a:lnSpc>
-                <a:spcPts val="2625"/>
-              </a:lnSpc>
-              <a:spcBef>
-                <a:spcPts val="0"/>
-              </a:spcBef>
-              <a:spcAft>
-                <a:spcPts val="0"/>
-              </a:spcAft>
-              <a:defRPr sz="2100" b="0">
+                <a:spcPts val="2500"/>
+              </a:lnSpc>
+              <a:spcBef>
+                <a:spcPts val="0"/>
+              </a:spcBef>
+              <a:spcAft>
+                <a:spcPts val="0"/>
+              </a:spcAft>
+              <a:defRPr sz="2000" b="0">
                 <a:solidFill>
                   <a:srgbClr val="17364B"/>
                 </a:solidFill>
@@ -9934,15 +9733,15 @@
           <a:p>
             <a:pPr>
               <a:lnSpc>
-                <a:spcPts val="2625"/>
-              </a:lnSpc>
-              <a:spcBef>
-                <a:spcPts val="0"/>
-              </a:spcBef>
-              <a:spcAft>
-                <a:spcPts val="0"/>
-              </a:spcAft>
-              <a:defRPr sz="2100" b="0">
+                <a:spcPts val="2500"/>
+              </a:lnSpc>
+              <a:spcBef>
+                <a:spcPts val="0"/>
+              </a:spcBef>
+              <a:spcAft>
+                <a:spcPts val="0"/>
+              </a:spcAft>
+              <a:defRPr sz="2000" b="0">
                 <a:solidFill>
                   <a:srgbClr val="17364B"/>
                 </a:solidFill>
@@ -9956,15 +9755,15 @@
           <a:p>
             <a:pPr>
               <a:lnSpc>
-                <a:spcPts val="2625"/>
-              </a:lnSpc>
-              <a:spcBef>
-                <a:spcPts val="0"/>
-              </a:spcBef>
-              <a:spcAft>
-                <a:spcPts val="0"/>
-              </a:spcAft>
-              <a:defRPr sz="2100" b="0">
+                <a:spcPts val="2500"/>
+              </a:lnSpc>
+              <a:spcBef>
+                <a:spcPts val="0"/>
+              </a:spcBef>
+              <a:spcAft>
+                <a:spcPts val="0"/>
+              </a:spcAft>
+              <a:defRPr sz="2000" b="0">
                 <a:solidFill>
                   <a:srgbClr val="17364B"/>
                 </a:solidFill>
@@ -9972,7 +9771,7 @@
               </a:defRPr>
             </a:pPr>
             <a:r>
-              <a:t>0 HIGH / CRITICAL</a:t>
+              <a:t>No HIGH / CRITICAL allowed</a:t>
             </a:r>
           </a:p>
         </p:txBody>
@@ -10213,7 +10012,7 @@
               </a:defRPr>
             </a:pPr>
             <a:r>
-              <a:t>Helm release 2 is running in the dedicated local cluster</a:t>
+              <a:t>Helm release 2 ran on the dedicated EKS cluster</a:t>
             </a:r>
           </a:p>
         </p:txBody>
@@ -10310,7 +10109,7 @@
       </p:sp>
       <p:pic>
         <p:nvPicPr>
-          <p:cNvPr id="7" name="Picture 6" descr="terminal-kubernetes.png"/>
+          <p:cNvPr id="7" name="Picture 6" descr="cloud-snapshot-terminal.png"/>
           <p:cNvPicPr>
             <a:picLocks noChangeAspect="1"/>
           </p:cNvPicPr>
@@ -10324,8 +10123,8 @@
         </p:blipFill>
         <p:spPr>
           <a:xfrm>
-            <a:off x="2000199" y="1346200"/>
-            <a:ext cx="8191601" cy="4660900"/>
+            <a:off x="2412385" y="1346200"/>
+            <a:ext cx="7367229" cy="4660900"/>
           </a:xfrm>
           <a:prstGeom prst="rect">
             <a:avLst/>
@@ -10372,7 +10171,7 @@
               </a:defRPr>
             </a:pPr>
             <a:r>
-              <a:t>Local context: labledger-capstone. UI/API Running; migration Job Completed as designed.</a:t>
+              <a:t>Actual EKS: ClusterIP Services, bound gp3, completed migration and deployed Helm releases.</a:t>
             </a:r>
           </a:p>
         </p:txBody>
@@ -10703,7 +10502,7 @@
               </a:defRPr>
             </a:pPr>
             <a:r>
-              <a:t>Observed API HPA response under controlled local CPU load.</a:t>
+              <a:t>Observed cloud API HPA response; one worker throughout.</a:t>
             </a:r>
           </a:p>
         </p:txBody>
@@ -10793,7 +10592,7 @@
               </a:defRPr>
             </a:pPr>
             <a:r>
-              <a:t>2,338 reads · 0 failures</a:t>
+              <a:t>7,431 reads · 12 failures</a:t>
             </a:r>
           </a:p>
         </p:txBody>
@@ -10838,7 +10637,7 @@
               </a:defRPr>
             </a:pPr>
             <a:r>
-              <a:t>Persistent HTTP connections; original</a:t>
+              <a:t>Separate lower-rate recovery: 40/40 HTTP</a:t>
             </a:r>
           </a:p>
           <a:p>
@@ -10860,7 +10659,7 @@
               </a:defRPr>
             </a:pPr>
             <a:r>
-              <a:t>request log retained.</a:t>
+              <a:t>200. Burst failures retained.</a:t>
             </a:r>
           </a:p>
         </p:txBody>
@@ -10950,7 +10749,7 @@
               </a:defRPr>
             </a:pPr>
             <a:r>
-              <a:t>200 → 503 → 200</a:t>
+              <a:t>200 → 502 → 200</a:t>
             </a:r>
           </a:p>
         </p:txBody>
@@ -11062,7 +10861,7 @@
               </a:defRPr>
             </a:pPr>
             <a:r>
-              <a:t>Original logs: evidence/local-cluster/README.md. No new failure was injected for these slides.</a:t>
+              <a:t>Actual cloud records retained. Earlier local 2,338 reads / 0 failures are separate evidence.</a:t>
             </a:r>
           </a:p>
         </p:txBody>

--- a/docs/presentation/LabLedger_Capstone_Presentation.pptx
+++ b/docs/presentation/LabLedger_Capstone_Presentation.pptx
@@ -528,7 +528,7 @@
           </a:p>
           <a:p>
             <a:r>
-              <a:t>The title image remains the original local UI capture, not an AWS browser image. New Terminal/API evidence documents the cloud run; private browser captures are not embedded while publication approval is pending.</a:t>
+              <a:t>The title image remains the original local UI capture, not an AWS browser image. This 26 October review corrects documentation using saved 16 October evidence, with no fresh runtime checks. Private browser captures are not embedded. ArgoCD is not implemented and the complete slides-first presentation remains unrecorded.</a:t>
             </a:r>
           </a:p>
         </p:txBody>
@@ -603,7 +603,7 @@
           </a:p>
           <a:p>
             <a:r>
-              <a:t>Grafana's authenticated API returned the actual six-panel dashboard, six traffic series and positive samples. Credentials remained in RAM. A populated browser panel is still a separate capture requirement.</a:t>
+              <a:t>Grafana's authenticated API returned the actual six-panel dashboard, six traffic series and positive samples. The genuine local six-panel browser capture was completed 16 October at 23:03:48 UTC after service recovery and remains private. Its one-hour range includes earlier revisions, rollout and recovery; it is not exclusively f271a837 or AWS evidence.</a:t>
             </a:r>
           </a:p>
           <a:p>
@@ -768,22 +768,27 @@
           <a:lstStyle/>
           <a:p>
             <a:r>
-              <a:t>Use the PDF or editable slides as a speaking guide. Play the separate native Terminal-only recording as supporting evidence, not a claim that the complete app/browser demo was recorded.</a:t>
-            </a:r>
-          </a:p>
-          <a:p>
-            <a:r>
-              <a:t>For a full live/remote walkthrough, open local UI/Swagger/Prometheus/Grafana in the School Chrome profile, show the genuine green run and package pages, and explain the retained change-to-rollout sequence.</a:t>
-            </a:r>
-          </a:p>
-          <a:p>
-            <a:r>
-              <a:t>Actual cloud deployment, delivery update, metrics, troubleshooting and project-only cleanup are complete. The temporary AWS endpoint is retired; local demonstration instructions remain reproducible.</a:t>
-            </a:r>
-          </a:p>
-          <a:p>
-            <a:r>
-              <a:t>The student reported manually submitting the form. No automated submission, instructor acceptance or submission receipt is claimed, and no further form actions are performed.</a:t>
+              <a:t>This is a local review candidate, not a claim that the full assignment is ready. The 26 October 14:11 IST class announcement requires the video and PPT/PDF under demo/ in the same submitted repository by EOD; 14:17 IST also permits a Drive-video link in Markdown under demo/. No exact EOD clock time was specified in the supplied announcement.</a:t>
+            </a:r>
+          </a:p>
+          <a:p>
+            <a:r>
+              <a:t>M10 is README 2 marks, video 2, slides 1. The guide says a missing video yields zero for M10 only. Assessment remains the instructor's decision.</a:t>
+            </a:r>
+          </a:p>
+          <a:p>
+            <a:r>
+              <a:t>The 3m54.5s Terminal recording covers a genuine source change, push, CI and local deployment. It does not start with these slides or show the complete AWS Console, ArgoCD synced/GitOps, Kubernetes/Prometheus/Grafana browser flow. ArgoCD is not implemented; direct Helm deployment is not a substitute for it.</a:t>
+            </a:r>
+          </a:p>
+          <a:p>
+            <a:r>
+              <a:t>A genuine local populated Grafana screenshot exists privately, including earlier revisions and recovery. Saved AWS evidence documents a retired environment; no restart or provisioning is authorized. No new runtime checks were performed for this docs-only review.</a:t>
+            </a:r>
+          </a:p>
+          <a:p>
+            <a:r>
+              <a:t>The student reported manually submitting the form. No receipt, instructor acceptance, resubmission or new form action is claimed. Publishing the prepared demo/ and changed docs still requires specific approval.</a:t>
             </a:r>
           </a:p>
         </p:txBody>
@@ -1193,22 +1198,22 @@
           <a:lstStyle/>
           <a:p>
             <a:r>
-              <a:t>Show actual completed run 38934060961, seven successful jobs for 06909ce. It tested the controller fix and published both multiarch SHA image tags.</a:t>
-            </a:r>
-          </a:p>
-          <a:p>
-            <a:r>
-              <a:t>Anonymous exact-tag manifest fetches succeeded. A deliberate personal-account Helm promotion then rolled the cloud application to exactly06909ce, release2, with Ready UI/API Pods.</a:t>
-            </a:r>
-          </a:p>
-          <a:p>
-            <a:r>
-              <a:t>The screenshot combines explicitly completed CI/promotion records with actual current Deployment image queries. A later documentation-only commit is not a newly tested image.</a:t>
-            </a:r>
-          </a:p>
-          <a:p>
-            <a:r>
-              <a:t>The earlier visible footer change and c2f4acf local rollout remain independently documented. CI publishes images; AWS promotion is an explicit guarded step, not automatic cloud access.</a:t>
+              <a:t>The displayed native Terminal image is historical cloud evidence: 06909ce, actual seven-green CI 38934060961, then exact-SHA EKS Helm release 2. It is not the final local revision.</a:t>
+            </a:r>
+          </a:p>
+          <a:p>
+            <a:r>
+              <a:t>The later local source change f271a837 has all seven jobs green in CI 38977458426. The genuine 3m54.5s recording shows a new accessibility refinement, 9 frontend tests/build, personal Git push, actual CI wait, anonymous pulls of the exact published ARM64 images, and local Helm release 4.</a:t>
+            </a:r>
+          </a:p>
+          <a:p>
+            <a:r>
+              <a:t>All four Ready local app Pods matched the published platform config digests. Separate School-profile captures show matching Arduino/requested filters and the new Show all loans reset.</a:t>
+            </a:r>
+          </a:p>
+          <a:p>
+            <a:r>
+              <a:t>The video is prepared privately under demo/ as a review candidate. It is Terminal-only and does not cover slides-first narration, AWS Console, ArgoCD or a full browser walkthrough. Delivery uses explicit Helm; no ArgoCD sync or automatic GitOps reconciliation is implemented.</a:t>
             </a:r>
           </a:p>
         </p:txBody>
@@ -1288,7 +1293,7 @@
           </a:p>
           <a:p>
             <a:r>
-              <a:t>Trivy uses HIGH,CRITICAL with ignore-unfixed=false and exit-code1; no broad ignore gate was added. Earlier downloaded reports have zero HIGH/CRITICAL findings. Fresh06909ce metadata verifies all four strict scan jobs succeeded; their raw report ZIPs were not downloaded.</a:t>
+              <a:t>Trivy uses HIGH,CRITICAL with ignore-unfixed=false and exit-code1; no broad ignore gate was added. Earlier downloaded reports have zero HIGH/CRITICAL findings. Historical 06909ce and final local f271a837 metadata each verify all four strict scan jobs succeeded; their fresh raw report ZIPs were not downloaded.</a:t>
             </a:r>
           </a:p>
           <a:p>
@@ -4552,7 +4557,7 @@
               </a:defRPr>
             </a:pPr>
             <a:r>
-              <a:t>DEVOPS FINAL CAPSTONE · LOCAL AND AWS EVIDENCE</a:t>
+              <a:t>REVIEW CANDIDATE · 26 OCTOBER 2026</a:t>
             </a:r>
           </a:p>
         </p:txBody>
@@ -5131,7 +5136,7 @@
               </a:defRPr>
             </a:pPr>
             <a:r>
-              <a:t>Actual application scraping is healthy</a:t>
+              <a:t>Monitoring evidence has a clear scope</a:t>
             </a:r>
           </a:p>
         </p:txBody>
@@ -5303,7 +5308,7 @@
         </p:nvSpPr>
         <p:spPr>
           <a:xfrm>
-            <a:off x="812800" y="6057900"/>
+            <a:off x="812800" y="6007100"/>
             <a:ext cx="10414000" cy="260350"/>
           </a:xfrm>
           <a:prstGeom prst="rect">
@@ -5335,7 +5340,52 @@
               </a:defRPr>
             </a:pPr>
             <a:r>
-              <a:t>Grafana: real API data verified; populated browser-panel capture still pending login.</a:t>
+              <a:t>Local Grafana: six populated panels captured privately on 16 Oct, 23:03 UTC.</a:t>
+            </a:r>
+          </a:p>
+        </p:txBody>
+      </p:sp>
+      <p:sp>
+        <p:nvSpPr>
+          <p:cNvPr id="10" name="TextBox 9"/>
+          <p:cNvSpPr txBox="1"/>
+          <p:nvPr/>
+        </p:nvSpPr>
+        <p:spPr>
+          <a:xfrm>
+            <a:off x="812800" y="6248400"/>
+            <a:ext cx="10414000" cy="212725"/>
+          </a:xfrm>
+          <a:prstGeom prst="rect">
+            <a:avLst/>
+          </a:prstGeom>
+          <a:noFill/>
+        </p:spPr>
+        <p:txBody>
+          <a:bodyPr wrap="none" lIns="0" rIns="0" tIns="0" bIns="0">
+            <a:spAutoFit/>
+          </a:bodyPr>
+          <a:lstStyle/>
+          <a:p>
+            <a:pPr>
+              <a:lnSpc>
+                <a:spcPts val="1375"/>
+              </a:lnSpc>
+              <a:spcBef>
+                <a:spcPts val="0"/>
+              </a:spcBef>
+              <a:spcAft>
+                <a:spcPts val="0"/>
+              </a:spcAft>
+              <a:defRPr sz="1100" b="0">
+                <a:solidFill>
+                  <a:srgbClr val="526C7B"/>
+                </a:solidFill>
+                <a:latin typeface="Arial"/>
+              </a:defRPr>
+            </a:pPr>
+            <a:r>
+              <a:t>One-hour history spans revisions and recovery; private browser image is not embedded.</a:t>
             </a:r>
           </a:p>
         </p:txBody>
@@ -5976,7 +6026,7 @@
               </a:defRPr>
             </a:pPr>
             <a:r>
-              <a:t>Verified and reproducible</a:t>
+              <a:t>Prepared locally for review</a:t>
             </a:r>
           </a:p>
         </p:txBody>
@@ -6021,7 +6071,7 @@
               </a:defRPr>
             </a:pPr>
             <a:r>
-              <a:t>Original app, seven green CI jobs, exact-SHA EKS rollout, real metrics, recovery and verified cleanup.</a:t>
+              <a:t>Updated deck + actual local change-to-rollout video under demo/. Nothing new is published.</a:t>
             </a:r>
           </a:p>
         </p:txBody>
@@ -6066,7 +6116,7 @@
               </a:defRPr>
             </a:pPr>
             <a:r>
-              <a:t>Remaining evidence limits</a:t>
+              <a:t>Full presentation remains incomplete</a:t>
             </a:r>
           </a:p>
         </p:txBody>
@@ -6080,7 +6130,7 @@
         <p:spPr>
           <a:xfrm>
             <a:off x="812800" y="2759075"/>
-            <a:ext cx="10414000" cy="577850"/>
+            <a:ext cx="10414000" cy="307975"/>
           </a:xfrm>
           <a:prstGeom prst="rect">
             <a:avLst/>
@@ -6111,29 +6161,7 @@
               </a:defRPr>
             </a:pPr>
             <a:r>
-              <a:t>Private browser captures need publication approval. Populated Grafana and the full student live walkthrough</a:t>
-            </a:r>
-          </a:p>
-          <a:p>
-            <a:pPr>
-              <a:lnSpc>
-                <a:spcPts val="2125"/>
-              </a:lnSpc>
-              <a:spcBef>
-                <a:spcPts val="0"/>
-              </a:spcBef>
-              <a:spcAft>
-                <a:spcPts val="0"/>
-              </a:spcAft>
-              <a:defRPr sz="1700" b="0">
-                <a:solidFill>
-                  <a:srgbClr val="526C7B"/>
-                </a:solidFill>
-                <a:latin typeface="Arial"/>
-              </a:defRPr>
-            </a:pPr>
-            <a:r>
-              <a:t>remain separate.</a:t>
+              <a:t>ArgoCD is absent. The slides-first AWS Console / GitOps / browser walkthrough is not recorded.</a:t>
             </a:r>
           </a:p>
         </p:txBody>
@@ -6146,7 +6174,7 @@
         </p:nvSpPr>
         <p:spPr>
           <a:xfrm>
-            <a:off x="812800" y="3527425"/>
+            <a:off x="812800" y="3257550"/>
             <a:ext cx="10414000" cy="371475"/>
           </a:xfrm>
           <a:prstGeom prst="rect">
@@ -6178,7 +6206,7 @@
               </a:defRPr>
             </a:pPr>
             <a:r>
-              <a:t>Continue in the final repository</a:t>
+              <a:t>Keep the evidence honest</a:t>
             </a:r>
           </a:p>
         </p:txBody>
@@ -6191,8 +6219,8 @@
         </p:nvSpPr>
         <p:spPr>
           <a:xfrm>
-            <a:off x="812800" y="3921125"/>
-            <a:ext cx="10414000" cy="307975"/>
+            <a:off x="812800" y="3651250"/>
+            <a:ext cx="10414000" cy="577850"/>
           </a:xfrm>
           <a:prstGeom prst="rect">
             <a:avLst/>
@@ -6223,7 +6251,29 @@
               </a:defRPr>
             </a:pPr>
             <a:r>
-              <a:t>The student reported manual form submission. No further form action or receipt is claimed.</a:t>
+              <a:t>Local populated Grafana capture is private historical evidence. AWS is retired; the form is user-reported</a:t>
+            </a:r>
+          </a:p>
+          <a:p>
+            <a:pPr>
+              <a:lnSpc>
+                <a:spcPts val="2125"/>
+              </a:lnSpc>
+              <a:spcBef>
+                <a:spcPts val="0"/>
+              </a:spcBef>
+              <a:spcAft>
+                <a:spcPts val="0"/>
+              </a:spcAft>
+              <a:defRPr sz="1700" b="0">
+                <a:solidFill>
+                  <a:srgbClr val="526C7B"/>
+                </a:solidFill>
+                <a:latin typeface="Arial"/>
+              </a:defRPr>
+            </a:pPr>
+            <a:r>
+              <a:t>submitted.</a:t>
             </a:r>
           </a:p>
         </p:txBody>
@@ -6271,7 +6321,7 @@
               <a:rPr>
                 <a:hlinkClick r:id="rId3"/>
               </a:rPr>
-              <a:t>Public repository and complete evidence index</a:t>
+              <a:t>Submitted repository; prepared review files are not yet published</a:t>
             </a:r>
           </a:p>
         </p:txBody>
@@ -9008,8 +9058,8 @@
         </p:blipFill>
         <p:spPr>
           <a:xfrm>
-            <a:off x="2583016" y="1346199"/>
-            <a:ext cx="7025967" cy="4445000"/>
+            <a:off x="2904203" y="1308100"/>
+            <a:ext cx="6383593" cy="4038600"/>
           </a:xfrm>
           <a:prstGeom prst="rect">
             <a:avLst/>
@@ -9024,8 +9074,8 @@
         </p:nvSpPr>
         <p:spPr>
           <a:xfrm>
-            <a:off x="812800" y="5918200"/>
-            <a:ext cx="10414000" cy="244475"/>
+            <a:off x="812800" y="5473700"/>
+            <a:ext cx="10414000" cy="260350"/>
           </a:xfrm>
           <a:prstGeom prst="rect">
             <a:avLst/>
@@ -9040,15 +9090,15 @@
           <a:p>
             <a:pPr>
               <a:lnSpc>
-                <a:spcPts val="1625"/>
-              </a:lnSpc>
-              <a:spcBef>
-                <a:spcPts val="0"/>
-              </a:spcBef>
-              <a:spcAft>
-                <a:spcPts val="0"/>
-              </a:spcAft>
-              <a:defRPr sz="1300" b="0">
+                <a:spcPts val="1750"/>
+              </a:lnSpc>
+              <a:spcBef>
+                <a:spcPts val="0"/>
+              </a:spcBef>
+              <a:spcAft>
+                <a:spcPts val="0"/>
+              </a:spcAft>
+              <a:defRPr sz="1400" b="0">
                 <a:solidFill>
                   <a:srgbClr val="526C7B"/>
                 </a:solidFill>
@@ -9056,7 +9106,7 @@
               </a:defRPr>
             </a:pPr>
             <a:r>
-              <a:t>Controller fix → seven green jobs → exact 06909ce EKS rollout, Helm release 2.</a:t>
+              <a:t>Shown: historical 06909ce EKS rollout, release 2; infrastructure is retired.</a:t>
             </a:r>
           </a:p>
         </p:txBody>
@@ -9069,8 +9119,8 @@
         </p:nvSpPr>
         <p:spPr>
           <a:xfrm>
-            <a:off x="812800" y="6210300"/>
-            <a:ext cx="10414000" cy="212725"/>
+            <a:off x="812800" y="5829300"/>
+            <a:ext cx="10414000" cy="260350"/>
           </a:xfrm>
           <a:prstGeom prst="rect">
             <a:avLst/>
@@ -9085,6 +9135,51 @@
           <a:p>
             <a:pPr>
               <a:lnSpc>
+                <a:spcPts val="1750"/>
+              </a:lnSpc>
+              <a:spcBef>
+                <a:spcPts val="0"/>
+              </a:spcBef>
+              <a:spcAft>
+                <a:spcPts val="0"/>
+              </a:spcAft>
+              <a:defRPr sz="1400" b="1">
+                <a:solidFill>
+                  <a:srgbClr val="007E80"/>
+                </a:solidFill>
+                <a:latin typeface="Arial"/>
+              </a:defRPr>
+            </a:pPr>
+            <a:r>
+              <a:t>Later local: f271a837 → 7 green CI jobs → exact images → Helm release 4.</a:t>
+            </a:r>
+          </a:p>
+        </p:txBody>
+      </p:sp>
+      <p:sp>
+        <p:nvSpPr>
+          <p:cNvPr id="10" name="TextBox 9"/>
+          <p:cNvSpPr txBox="1"/>
+          <p:nvPr/>
+        </p:nvSpPr>
+        <p:spPr>
+          <a:xfrm>
+            <a:off x="812800" y="6210300"/>
+            <a:ext cx="10414000" cy="212725"/>
+          </a:xfrm>
+          <a:prstGeom prst="rect">
+            <a:avLst/>
+          </a:prstGeom>
+          <a:noFill/>
+        </p:spPr>
+        <p:txBody>
+          <a:bodyPr wrap="none" lIns="0" rIns="0" tIns="0" bIns="0">
+            <a:spAutoFit/>
+          </a:bodyPr>
+          <a:lstStyle/>
+          <a:p>
+            <a:pPr>
+              <a:lnSpc>
                 <a:spcPts val="1375"/>
               </a:lnSpc>
               <a:spcBef>
@@ -9104,7 +9199,7 @@
               <a:rPr>
                 <a:hlinkClick r:id="rId4"/>
               </a:rPr>
-              <a:t>Open the actual seven-job green run</a:t>
+              <a:t>Open the final local change’s seven-job green run</a:t>
             </a:r>
           </a:p>
         </p:txBody>
